--- a/office-templates/PPADEM-presentation-example.pptx
+++ b/office-templates/PPADEM-presentation-example.pptx
@@ -1394,6 +1394,30 @@
           </a:p>
         </p:txBody>
       </p:sp>
+      <p:pic>
+        <p:nvPicPr>
+          <p:cNvPr id="6" name="EU logo" descr="Funded by the European Union. European Research Council"/>
+          <p:cNvPicPr>
+            <a:picLocks noChangeAspect="1"/>
+          </p:cNvPicPr>
+          <p:nvPr userDrawn="1"/>
+        </p:nvPicPr>
+        <p:blipFill>
+          <a:blip r:embed="rId3"/>
+          <a:stretch>
+            <a:fillRect/>
+          </a:stretch>
+        </p:blipFill>
+        <p:spPr>
+          <a:xfrm>
+            <a:off x="5034282" y="5486400"/>
+            <a:ext cx="2123132" cy="914400"/>
+          </a:xfrm>
+          <a:prstGeom prst="rect">
+            <a:avLst/>
+          </a:prstGeom>
+        </p:spPr>
+      </p:pic>
     </p:spTree>
   </p:cSld>
   <p:clrMapOvr>
